--- a/pptx/02 Numpy.pptx
+++ b/pptx/02 Numpy.pptx
@@ -29,7 +29,7 @@
     <p:sldId id="273" r:id="rId20"/>
     <p:sldId id="274" r:id="rId21"/>
     <p:sldId id="275" r:id="rId22"/>
-    <p:sldId id="276" r:id="rId23"/>
+    <p:sldId id="278" r:id="rId23"/>
   </p:sldIdLst>
   <p:sldSz cx="9144000" cy="5143500" type="screen16x9"/>
   <p:notesSz cx="6858000" cy="9144000"/>
@@ -2215,110 +2215,6 @@
 </p:notes>
 </file>
 
-<file path=ppt/notesSlides/notesSlide22.xml><?xml version="1.0" encoding="utf-8"?>
-<p:notes xmlns:a="http://schemas.openxmlformats.org/drawingml/2006/main" xmlns:r="http://schemas.openxmlformats.org/officeDocument/2006/relationships" xmlns:p="http://schemas.openxmlformats.org/presentationml/2006/main" showMasterSp="0" showMasterPhAnim="0">
-  <p:cSld>
-    <p:spTree>
-      <p:nvGrpSpPr>
-        <p:cNvPr id="1" name="Shape 274"/>
-        <p:cNvGrpSpPr/>
-        <p:nvPr/>
-      </p:nvGrpSpPr>
-      <p:grpSpPr>
-        <a:xfrm>
-          <a:off x="0" y="0"/>
-          <a:ext cx="0" cy="0"/>
-          <a:chOff x="0" y="0"/>
-          <a:chExt cx="0" cy="0"/>
-        </a:xfrm>
-      </p:grpSpPr>
-      <p:sp>
-        <p:nvSpPr>
-          <p:cNvPr id="275" name="Google Shape;275;gef2bb6bc3d_0_0:notes"/>
-          <p:cNvSpPr>
-            <a:spLocks noGrp="1" noRot="1" noChangeAspect="1"/>
-          </p:cNvSpPr>
-          <p:nvPr>
-            <p:ph type="sldImg" idx="2"/>
-          </p:nvPr>
-        </p:nvSpPr>
-        <p:spPr>
-          <a:xfrm>
-            <a:off x="381000" y="685800"/>
-            <a:ext cx="6096000" cy="3429000"/>
-          </a:xfrm>
-          <a:custGeom>
-            <a:avLst/>
-            <a:gdLst/>
-            <a:ahLst/>
-            <a:cxnLst/>
-            <a:rect l="l" t="t" r="r" b="b"/>
-            <a:pathLst>
-              <a:path w="120000" h="120000" extrusionOk="0">
-                <a:moveTo>
-                  <a:pt x="0" y="0"/>
-                </a:moveTo>
-                <a:lnTo>
-                  <a:pt x="120000" y="0"/>
-                </a:lnTo>
-                <a:lnTo>
-                  <a:pt x="120000" y="120000"/>
-                </a:lnTo>
-                <a:lnTo>
-                  <a:pt x="0" y="120000"/>
-                </a:lnTo>
-                <a:close/>
-              </a:path>
-            </a:pathLst>
-          </a:custGeom>
-        </p:spPr>
-      </p:sp>
-      <p:sp>
-        <p:nvSpPr>
-          <p:cNvPr id="276" name="Google Shape;276;gef2bb6bc3d_0_0:notes"/>
-          <p:cNvSpPr txBox="1">
-            <a:spLocks noGrp="1"/>
-          </p:cNvSpPr>
-          <p:nvPr>
-            <p:ph type="body" idx="1"/>
-          </p:nvPr>
-        </p:nvSpPr>
-        <p:spPr>
-          <a:xfrm>
-            <a:off x="685800" y="4343400"/>
-            <a:ext cx="5486400" cy="4114800"/>
-          </a:xfrm>
-          <a:prstGeom prst="rect">
-            <a:avLst/>
-          </a:prstGeom>
-        </p:spPr>
-        <p:txBody>
-          <a:bodyPr spcFirstLastPara="1" wrap="square" lIns="91425" tIns="91425" rIns="91425" bIns="91425" anchor="t" anchorCtr="0">
-            <a:noAutofit/>
-          </a:bodyPr>
-          <a:lstStyle/>
-          <a:p>
-            <a:pPr marL="0" lvl="0" indent="0" algn="l" rtl="0">
-              <a:spcBef>
-                <a:spcPts val="0"/>
-              </a:spcBef>
-              <a:spcAft>
-                <a:spcPts val="0"/>
-              </a:spcAft>
-              <a:buNone/>
-            </a:pPr>
-            <a:endParaRPr/>
-          </a:p>
-        </p:txBody>
-      </p:sp>
-    </p:spTree>
-  </p:cSld>
-  <p:clrMapOvr>
-    <a:masterClrMapping/>
-  </p:clrMapOvr>
-</p:notes>
-</file>
-
 <file path=ppt/notesSlides/notesSlide3.xml><?xml version="1.0" encoding="utf-8"?>
 <p:notes xmlns:a="http://schemas.openxmlformats.org/drawingml/2006/main" xmlns:r="http://schemas.openxmlformats.org/officeDocument/2006/relationships" xmlns:p="http://schemas.openxmlformats.org/presentationml/2006/main" showMasterSp="0" showMasterPhAnim="0">
   <p:cSld>
@@ -3371,302 +3267,6 @@
 </file>
 
 <file path=ppt/slideLayouts/slideLayout10.xml><?xml version="1.0" encoding="utf-8"?>
-<p:sldLayout xmlns:a="http://schemas.openxmlformats.org/drawingml/2006/main" xmlns:r="http://schemas.openxmlformats.org/officeDocument/2006/relationships" xmlns:p="http://schemas.openxmlformats.org/presentationml/2006/main" matchingName="Title + text">
-  <p:cSld name="CUSTOM_14">
-    <p:bg>
-      <p:bgPr>
-        <a:blipFill>
-          <a:blip r:embed="rId2">
-            <a:alphaModFix/>
-          </a:blip>
-          <a:stretch>
-            <a:fillRect/>
-          </a:stretch>
-        </a:blipFill>
-        <a:effectLst/>
-      </p:bgPr>
-    </p:bg>
-    <p:spTree>
-      <p:nvGrpSpPr>
-        <p:cNvPr id="1" name="Shape 124"/>
-        <p:cNvGrpSpPr/>
-        <p:nvPr/>
-      </p:nvGrpSpPr>
-      <p:grpSpPr>
-        <a:xfrm>
-          <a:off x="0" y="0"/>
-          <a:ext cx="0" cy="0"/>
-          <a:chOff x="0" y="0"/>
-          <a:chExt cx="0" cy="0"/>
-        </a:xfrm>
-      </p:grpSpPr>
-      <p:sp>
-        <p:nvSpPr>
-          <p:cNvPr id="125" name="Google Shape;125;p24"/>
-          <p:cNvSpPr txBox="1">
-            <a:spLocks noGrp="1"/>
-          </p:cNvSpPr>
-          <p:nvPr>
-            <p:ph type="body" idx="1"/>
-          </p:nvPr>
-        </p:nvSpPr>
-        <p:spPr>
-          <a:xfrm>
-            <a:off x="642050" y="2134800"/>
-            <a:ext cx="5308200" cy="1476000"/>
-          </a:xfrm>
-          <a:prstGeom prst="rect">
-            <a:avLst/>
-          </a:prstGeom>
-        </p:spPr>
-        <p:txBody>
-          <a:bodyPr spcFirstLastPara="1" wrap="square" lIns="91425" tIns="91425" rIns="91425" bIns="91425" anchor="t" anchorCtr="0">
-            <a:noAutofit/>
-          </a:bodyPr>
-          <a:lstStyle>
-            <a:lvl1pPr marL="457200" lvl="0" indent="-304800" rtl="0">
-              <a:spcBef>
-                <a:spcPts val="0"/>
-              </a:spcBef>
-              <a:spcAft>
-                <a:spcPts val="0"/>
-              </a:spcAft>
-              <a:buSzPts val="1200"/>
-              <a:buChar char="●"/>
-              <a:defRPr/>
-            </a:lvl1pPr>
-            <a:lvl2pPr marL="914400" lvl="1" indent="-304800" rtl="0">
-              <a:spcBef>
-                <a:spcPts val="1600"/>
-              </a:spcBef>
-              <a:spcAft>
-                <a:spcPts val="0"/>
-              </a:spcAft>
-              <a:buSzPts val="1200"/>
-              <a:buChar char="○"/>
-              <a:defRPr/>
-            </a:lvl2pPr>
-            <a:lvl3pPr marL="1371600" lvl="2" indent="-304800" rtl="0">
-              <a:spcBef>
-                <a:spcPts val="1600"/>
-              </a:spcBef>
-              <a:spcAft>
-                <a:spcPts val="0"/>
-              </a:spcAft>
-              <a:buSzPts val="1200"/>
-              <a:buChar char="■"/>
-              <a:defRPr/>
-            </a:lvl3pPr>
-            <a:lvl4pPr marL="1828800" lvl="3" indent="-304800" rtl="0">
-              <a:spcBef>
-                <a:spcPts val="1600"/>
-              </a:spcBef>
-              <a:spcAft>
-                <a:spcPts val="0"/>
-              </a:spcAft>
-              <a:buSzPts val="1200"/>
-              <a:buChar char="●"/>
-              <a:defRPr/>
-            </a:lvl4pPr>
-            <a:lvl5pPr marL="2286000" lvl="4" indent="-304800" rtl="0">
-              <a:spcBef>
-                <a:spcPts val="1600"/>
-              </a:spcBef>
-              <a:spcAft>
-                <a:spcPts val="0"/>
-              </a:spcAft>
-              <a:buSzPts val="1200"/>
-              <a:buChar char="○"/>
-              <a:defRPr/>
-            </a:lvl5pPr>
-            <a:lvl6pPr marL="2743200" lvl="5" indent="-304800" rtl="0">
-              <a:spcBef>
-                <a:spcPts val="1600"/>
-              </a:spcBef>
-              <a:spcAft>
-                <a:spcPts val="0"/>
-              </a:spcAft>
-              <a:buSzPts val="1200"/>
-              <a:buChar char="■"/>
-              <a:defRPr/>
-            </a:lvl6pPr>
-            <a:lvl7pPr marL="3200400" lvl="6" indent="-304800" rtl="0">
-              <a:spcBef>
-                <a:spcPts val="1600"/>
-              </a:spcBef>
-              <a:spcAft>
-                <a:spcPts val="0"/>
-              </a:spcAft>
-              <a:buSzPts val="1200"/>
-              <a:buChar char="●"/>
-              <a:defRPr/>
-            </a:lvl7pPr>
-            <a:lvl8pPr marL="3657600" lvl="7" indent="-304800" rtl="0">
-              <a:spcBef>
-                <a:spcPts val="1600"/>
-              </a:spcBef>
-              <a:spcAft>
-                <a:spcPts val="0"/>
-              </a:spcAft>
-              <a:buSzPts val="1200"/>
-              <a:buChar char="○"/>
-              <a:defRPr/>
-            </a:lvl8pPr>
-            <a:lvl9pPr marL="4114800" lvl="8" indent="-304800" rtl="0">
-              <a:spcBef>
-                <a:spcPts val="1600"/>
-              </a:spcBef>
-              <a:spcAft>
-                <a:spcPts val="1600"/>
-              </a:spcAft>
-              <a:buSzPts val="1200"/>
-              <a:buChar char="■"/>
-              <a:defRPr/>
-            </a:lvl9pPr>
-          </a:lstStyle>
-          <a:p>
-            <a:endParaRPr/>
-          </a:p>
-        </p:txBody>
-      </p:sp>
-      <p:sp>
-        <p:nvSpPr>
-          <p:cNvPr id="126" name="Google Shape;126;p24"/>
-          <p:cNvSpPr txBox="1">
-            <a:spLocks noGrp="1"/>
-          </p:cNvSpPr>
-          <p:nvPr>
-            <p:ph type="ctrTitle"/>
-          </p:nvPr>
-        </p:nvSpPr>
-        <p:spPr>
-          <a:xfrm>
-            <a:off x="1964851" y="352850"/>
-            <a:ext cx="5214300" cy="946200"/>
-          </a:xfrm>
-          <a:prstGeom prst="rect">
-            <a:avLst/>
-          </a:prstGeom>
-        </p:spPr>
-        <p:txBody>
-          <a:bodyPr spcFirstLastPara="1" wrap="square" lIns="91425" tIns="91425" rIns="91425" bIns="91425" anchor="t" anchorCtr="0">
-            <a:noAutofit/>
-          </a:bodyPr>
-          <a:lstStyle>
-            <a:lvl1pPr lvl="0" algn="ctr" rtl="0">
-              <a:spcBef>
-                <a:spcPts val="0"/>
-              </a:spcBef>
-              <a:spcAft>
-                <a:spcPts val="0"/>
-              </a:spcAft>
-              <a:buSzPts val="2400"/>
-              <a:buNone/>
-              <a:defRPr sz="2400"/>
-            </a:lvl1pPr>
-            <a:lvl2pPr lvl="1" algn="r" rtl="0">
-              <a:spcBef>
-                <a:spcPts val="0"/>
-              </a:spcBef>
-              <a:spcAft>
-                <a:spcPts val="0"/>
-              </a:spcAft>
-              <a:buSzPts val="2400"/>
-              <a:buNone/>
-              <a:defRPr sz="2400"/>
-            </a:lvl2pPr>
-            <a:lvl3pPr lvl="2" algn="r" rtl="0">
-              <a:spcBef>
-                <a:spcPts val="0"/>
-              </a:spcBef>
-              <a:spcAft>
-                <a:spcPts val="0"/>
-              </a:spcAft>
-              <a:buSzPts val="2400"/>
-              <a:buNone/>
-              <a:defRPr sz="2400"/>
-            </a:lvl3pPr>
-            <a:lvl4pPr lvl="3" algn="r" rtl="0">
-              <a:spcBef>
-                <a:spcPts val="0"/>
-              </a:spcBef>
-              <a:spcAft>
-                <a:spcPts val="0"/>
-              </a:spcAft>
-              <a:buSzPts val="2400"/>
-              <a:buNone/>
-              <a:defRPr sz="2400"/>
-            </a:lvl4pPr>
-            <a:lvl5pPr lvl="4" algn="r" rtl="0">
-              <a:spcBef>
-                <a:spcPts val="0"/>
-              </a:spcBef>
-              <a:spcAft>
-                <a:spcPts val="0"/>
-              </a:spcAft>
-              <a:buSzPts val="2400"/>
-              <a:buNone/>
-              <a:defRPr sz="2400"/>
-            </a:lvl5pPr>
-            <a:lvl6pPr lvl="5" algn="r" rtl="0">
-              <a:spcBef>
-                <a:spcPts val="0"/>
-              </a:spcBef>
-              <a:spcAft>
-                <a:spcPts val="0"/>
-              </a:spcAft>
-              <a:buSzPts val="2400"/>
-              <a:buNone/>
-              <a:defRPr sz="2400"/>
-            </a:lvl6pPr>
-            <a:lvl7pPr lvl="6" algn="r" rtl="0">
-              <a:spcBef>
-                <a:spcPts val="0"/>
-              </a:spcBef>
-              <a:spcAft>
-                <a:spcPts val="0"/>
-              </a:spcAft>
-              <a:buSzPts val="2400"/>
-              <a:buNone/>
-              <a:defRPr sz="2400"/>
-            </a:lvl7pPr>
-            <a:lvl8pPr lvl="7" algn="r" rtl="0">
-              <a:spcBef>
-                <a:spcPts val="0"/>
-              </a:spcBef>
-              <a:spcAft>
-                <a:spcPts val="0"/>
-              </a:spcAft>
-              <a:buSzPts val="2400"/>
-              <a:buNone/>
-              <a:defRPr sz="2400"/>
-            </a:lvl8pPr>
-            <a:lvl9pPr lvl="8" algn="r" rtl="0">
-              <a:spcBef>
-                <a:spcPts val="0"/>
-              </a:spcBef>
-              <a:spcAft>
-                <a:spcPts val="0"/>
-              </a:spcAft>
-              <a:buSzPts val="2400"/>
-              <a:buNone/>
-              <a:defRPr sz="2400"/>
-            </a:lvl9pPr>
-          </a:lstStyle>
-          <a:p>
-            <a:endParaRPr/>
-          </a:p>
-        </p:txBody>
-      </p:sp>
-    </p:spTree>
-  </p:cSld>
-  <p:clrMapOvr>
-    <a:masterClrMapping/>
-  </p:clrMapOvr>
-</p:sldLayout>
-</file>
-
-<file path=ppt/slideLayouts/slideLayout11.xml><?xml version="1.0" encoding="utf-8"?>
 <p:sldLayout xmlns:a="http://schemas.openxmlformats.org/drawingml/2006/main" xmlns:r="http://schemas.openxmlformats.org/officeDocument/2006/relationships" xmlns:p="http://schemas.openxmlformats.org/presentationml/2006/main" matchingName="Blank slide">
   <p:cSld name="CUSTOM_33">
     <p:bg>
@@ -9264,160 +8864,6 @@
 </file>
 
 <file path=ppt/slideLayouts/slideLayout8.xml><?xml version="1.0" encoding="utf-8"?>
-<p:sldLayout xmlns:a="http://schemas.openxmlformats.org/drawingml/2006/main" xmlns:r="http://schemas.openxmlformats.org/officeDocument/2006/relationships" xmlns:p="http://schemas.openxmlformats.org/presentationml/2006/main" matchingName="Big title">
-  <p:cSld name="CUSTOM_29">
-    <p:spTree>
-      <p:nvGrpSpPr>
-        <p:cNvPr id="1" name="Shape 104"/>
-        <p:cNvGrpSpPr/>
-        <p:nvPr/>
-      </p:nvGrpSpPr>
-      <p:grpSpPr>
-        <a:xfrm>
-          <a:off x="0" y="0"/>
-          <a:ext cx="0" cy="0"/>
-          <a:chOff x="0" y="0"/>
-          <a:chExt cx="0" cy="0"/>
-        </a:xfrm>
-      </p:grpSpPr>
-      <p:sp>
-        <p:nvSpPr>
-          <p:cNvPr id="105" name="Google Shape;105;p17"/>
-          <p:cNvSpPr txBox="1">
-            <a:spLocks noGrp="1"/>
-          </p:cNvSpPr>
-          <p:nvPr>
-            <p:ph type="ctrTitle"/>
-          </p:nvPr>
-        </p:nvSpPr>
-        <p:spPr>
-          <a:xfrm flipH="1">
-            <a:off x="1193529" y="1611150"/>
-            <a:ext cx="5195700" cy="1921200"/>
-          </a:xfrm>
-          <a:prstGeom prst="rect">
-            <a:avLst/>
-          </a:prstGeom>
-        </p:spPr>
-        <p:txBody>
-          <a:bodyPr spcFirstLastPara="1" wrap="square" lIns="91425" tIns="91425" rIns="91425" bIns="91425" anchor="ctr" anchorCtr="0">
-            <a:noAutofit/>
-          </a:bodyPr>
-          <a:lstStyle>
-            <a:lvl1pPr lvl="0" rtl="0">
-              <a:spcBef>
-                <a:spcPts val="0"/>
-              </a:spcBef>
-              <a:spcAft>
-                <a:spcPts val="0"/>
-              </a:spcAft>
-              <a:buSzPts val="3600"/>
-              <a:buNone/>
-              <a:defRPr sz="3600"/>
-            </a:lvl1pPr>
-            <a:lvl2pPr lvl="1" rtl="0">
-              <a:spcBef>
-                <a:spcPts val="0"/>
-              </a:spcBef>
-              <a:spcAft>
-                <a:spcPts val="0"/>
-              </a:spcAft>
-              <a:buSzPts val="6500"/>
-              <a:buNone/>
-              <a:defRPr sz="6500"/>
-            </a:lvl2pPr>
-            <a:lvl3pPr lvl="2" rtl="0">
-              <a:spcBef>
-                <a:spcPts val="0"/>
-              </a:spcBef>
-              <a:spcAft>
-                <a:spcPts val="0"/>
-              </a:spcAft>
-              <a:buSzPts val="6500"/>
-              <a:buNone/>
-              <a:defRPr sz="6500"/>
-            </a:lvl3pPr>
-            <a:lvl4pPr lvl="3" rtl="0">
-              <a:spcBef>
-                <a:spcPts val="0"/>
-              </a:spcBef>
-              <a:spcAft>
-                <a:spcPts val="0"/>
-              </a:spcAft>
-              <a:buSzPts val="6500"/>
-              <a:buNone/>
-              <a:defRPr sz="6500"/>
-            </a:lvl4pPr>
-            <a:lvl5pPr lvl="4" rtl="0">
-              <a:spcBef>
-                <a:spcPts val="0"/>
-              </a:spcBef>
-              <a:spcAft>
-                <a:spcPts val="0"/>
-              </a:spcAft>
-              <a:buSzPts val="6500"/>
-              <a:buNone/>
-              <a:defRPr sz="6500"/>
-            </a:lvl5pPr>
-            <a:lvl6pPr lvl="5" rtl="0">
-              <a:spcBef>
-                <a:spcPts val="0"/>
-              </a:spcBef>
-              <a:spcAft>
-                <a:spcPts val="0"/>
-              </a:spcAft>
-              <a:buSzPts val="6500"/>
-              <a:buNone/>
-              <a:defRPr sz="6500"/>
-            </a:lvl6pPr>
-            <a:lvl7pPr lvl="6" rtl="0">
-              <a:spcBef>
-                <a:spcPts val="0"/>
-              </a:spcBef>
-              <a:spcAft>
-                <a:spcPts val="0"/>
-              </a:spcAft>
-              <a:buSzPts val="6500"/>
-              <a:buNone/>
-              <a:defRPr sz="6500"/>
-            </a:lvl7pPr>
-            <a:lvl8pPr lvl="7" rtl="0">
-              <a:spcBef>
-                <a:spcPts val="0"/>
-              </a:spcBef>
-              <a:spcAft>
-                <a:spcPts val="0"/>
-              </a:spcAft>
-              <a:buSzPts val="6500"/>
-              <a:buNone/>
-              <a:defRPr sz="6500"/>
-            </a:lvl8pPr>
-            <a:lvl9pPr lvl="8" rtl="0">
-              <a:spcBef>
-                <a:spcPts val="0"/>
-              </a:spcBef>
-              <a:spcAft>
-                <a:spcPts val="0"/>
-              </a:spcAft>
-              <a:buSzPts val="6500"/>
-              <a:buNone/>
-              <a:defRPr sz="6500"/>
-            </a:lvl9pPr>
-          </a:lstStyle>
-          <a:p>
-            <a:endParaRPr/>
-          </a:p>
-        </p:txBody>
-      </p:sp>
-    </p:spTree>
-  </p:cSld>
-  <p:clrMapOvr>
-    <a:masterClrMapping/>
-  </p:clrMapOvr>
-</p:sldLayout>
-</file>
-
-<file path=ppt/slideLayouts/slideLayout9.xml><?xml version="1.0" encoding="utf-8"?>
 <p:sldLayout xmlns:a="http://schemas.openxmlformats.org/drawingml/2006/main" xmlns:r="http://schemas.openxmlformats.org/officeDocument/2006/relationships" xmlns:p="http://schemas.openxmlformats.org/presentationml/2006/main" matchingName="Section 5">
   <p:cSld name="CUSTOM_30">
     <p:bg>
@@ -10014,6 +9460,302 @@
               <a:buSzPts val="1200"/>
               <a:buNone/>
               <a:defRPr/>
+            </a:lvl9pPr>
+          </a:lstStyle>
+          <a:p>
+            <a:endParaRPr/>
+          </a:p>
+        </p:txBody>
+      </p:sp>
+    </p:spTree>
+  </p:cSld>
+  <p:clrMapOvr>
+    <a:masterClrMapping/>
+  </p:clrMapOvr>
+</p:sldLayout>
+</file>
+
+<file path=ppt/slideLayouts/slideLayout9.xml><?xml version="1.0" encoding="utf-8"?>
+<p:sldLayout xmlns:a="http://schemas.openxmlformats.org/drawingml/2006/main" xmlns:r="http://schemas.openxmlformats.org/officeDocument/2006/relationships" xmlns:p="http://schemas.openxmlformats.org/presentationml/2006/main" matchingName="Title + text">
+  <p:cSld name="CUSTOM_14">
+    <p:bg>
+      <p:bgPr>
+        <a:blipFill>
+          <a:blip r:embed="rId2">
+            <a:alphaModFix/>
+          </a:blip>
+          <a:stretch>
+            <a:fillRect/>
+          </a:stretch>
+        </a:blipFill>
+        <a:effectLst/>
+      </p:bgPr>
+    </p:bg>
+    <p:spTree>
+      <p:nvGrpSpPr>
+        <p:cNvPr id="1" name="Shape 124"/>
+        <p:cNvGrpSpPr/>
+        <p:nvPr/>
+      </p:nvGrpSpPr>
+      <p:grpSpPr>
+        <a:xfrm>
+          <a:off x="0" y="0"/>
+          <a:ext cx="0" cy="0"/>
+          <a:chOff x="0" y="0"/>
+          <a:chExt cx="0" cy="0"/>
+        </a:xfrm>
+      </p:grpSpPr>
+      <p:sp>
+        <p:nvSpPr>
+          <p:cNvPr id="125" name="Google Shape;125;p24"/>
+          <p:cNvSpPr txBox="1">
+            <a:spLocks noGrp="1"/>
+          </p:cNvSpPr>
+          <p:nvPr>
+            <p:ph type="body" idx="1"/>
+          </p:nvPr>
+        </p:nvSpPr>
+        <p:spPr>
+          <a:xfrm>
+            <a:off x="642050" y="2134800"/>
+            <a:ext cx="5308200" cy="1476000"/>
+          </a:xfrm>
+          <a:prstGeom prst="rect">
+            <a:avLst/>
+          </a:prstGeom>
+        </p:spPr>
+        <p:txBody>
+          <a:bodyPr spcFirstLastPara="1" wrap="square" lIns="91425" tIns="91425" rIns="91425" bIns="91425" anchor="t" anchorCtr="0">
+            <a:noAutofit/>
+          </a:bodyPr>
+          <a:lstStyle>
+            <a:lvl1pPr marL="457200" lvl="0" indent="-304800" rtl="0">
+              <a:spcBef>
+                <a:spcPts val="0"/>
+              </a:spcBef>
+              <a:spcAft>
+                <a:spcPts val="0"/>
+              </a:spcAft>
+              <a:buSzPts val="1200"/>
+              <a:buChar char="●"/>
+              <a:defRPr/>
+            </a:lvl1pPr>
+            <a:lvl2pPr marL="914400" lvl="1" indent="-304800" rtl="0">
+              <a:spcBef>
+                <a:spcPts val="1600"/>
+              </a:spcBef>
+              <a:spcAft>
+                <a:spcPts val="0"/>
+              </a:spcAft>
+              <a:buSzPts val="1200"/>
+              <a:buChar char="○"/>
+              <a:defRPr/>
+            </a:lvl2pPr>
+            <a:lvl3pPr marL="1371600" lvl="2" indent="-304800" rtl="0">
+              <a:spcBef>
+                <a:spcPts val="1600"/>
+              </a:spcBef>
+              <a:spcAft>
+                <a:spcPts val="0"/>
+              </a:spcAft>
+              <a:buSzPts val="1200"/>
+              <a:buChar char="■"/>
+              <a:defRPr/>
+            </a:lvl3pPr>
+            <a:lvl4pPr marL="1828800" lvl="3" indent="-304800" rtl="0">
+              <a:spcBef>
+                <a:spcPts val="1600"/>
+              </a:spcBef>
+              <a:spcAft>
+                <a:spcPts val="0"/>
+              </a:spcAft>
+              <a:buSzPts val="1200"/>
+              <a:buChar char="●"/>
+              <a:defRPr/>
+            </a:lvl4pPr>
+            <a:lvl5pPr marL="2286000" lvl="4" indent="-304800" rtl="0">
+              <a:spcBef>
+                <a:spcPts val="1600"/>
+              </a:spcBef>
+              <a:spcAft>
+                <a:spcPts val="0"/>
+              </a:spcAft>
+              <a:buSzPts val="1200"/>
+              <a:buChar char="○"/>
+              <a:defRPr/>
+            </a:lvl5pPr>
+            <a:lvl6pPr marL="2743200" lvl="5" indent="-304800" rtl="0">
+              <a:spcBef>
+                <a:spcPts val="1600"/>
+              </a:spcBef>
+              <a:spcAft>
+                <a:spcPts val="0"/>
+              </a:spcAft>
+              <a:buSzPts val="1200"/>
+              <a:buChar char="■"/>
+              <a:defRPr/>
+            </a:lvl6pPr>
+            <a:lvl7pPr marL="3200400" lvl="6" indent="-304800" rtl="0">
+              <a:spcBef>
+                <a:spcPts val="1600"/>
+              </a:spcBef>
+              <a:spcAft>
+                <a:spcPts val="0"/>
+              </a:spcAft>
+              <a:buSzPts val="1200"/>
+              <a:buChar char="●"/>
+              <a:defRPr/>
+            </a:lvl7pPr>
+            <a:lvl8pPr marL="3657600" lvl="7" indent="-304800" rtl="0">
+              <a:spcBef>
+                <a:spcPts val="1600"/>
+              </a:spcBef>
+              <a:spcAft>
+                <a:spcPts val="0"/>
+              </a:spcAft>
+              <a:buSzPts val="1200"/>
+              <a:buChar char="○"/>
+              <a:defRPr/>
+            </a:lvl8pPr>
+            <a:lvl9pPr marL="4114800" lvl="8" indent="-304800" rtl="0">
+              <a:spcBef>
+                <a:spcPts val="1600"/>
+              </a:spcBef>
+              <a:spcAft>
+                <a:spcPts val="1600"/>
+              </a:spcAft>
+              <a:buSzPts val="1200"/>
+              <a:buChar char="■"/>
+              <a:defRPr/>
+            </a:lvl9pPr>
+          </a:lstStyle>
+          <a:p>
+            <a:endParaRPr/>
+          </a:p>
+        </p:txBody>
+      </p:sp>
+      <p:sp>
+        <p:nvSpPr>
+          <p:cNvPr id="126" name="Google Shape;126;p24"/>
+          <p:cNvSpPr txBox="1">
+            <a:spLocks noGrp="1"/>
+          </p:cNvSpPr>
+          <p:nvPr>
+            <p:ph type="ctrTitle"/>
+          </p:nvPr>
+        </p:nvSpPr>
+        <p:spPr>
+          <a:xfrm>
+            <a:off x="1964851" y="352850"/>
+            <a:ext cx="5214300" cy="946200"/>
+          </a:xfrm>
+          <a:prstGeom prst="rect">
+            <a:avLst/>
+          </a:prstGeom>
+        </p:spPr>
+        <p:txBody>
+          <a:bodyPr spcFirstLastPara="1" wrap="square" lIns="91425" tIns="91425" rIns="91425" bIns="91425" anchor="t" anchorCtr="0">
+            <a:noAutofit/>
+          </a:bodyPr>
+          <a:lstStyle>
+            <a:lvl1pPr lvl="0" algn="ctr" rtl="0">
+              <a:spcBef>
+                <a:spcPts val="0"/>
+              </a:spcBef>
+              <a:spcAft>
+                <a:spcPts val="0"/>
+              </a:spcAft>
+              <a:buSzPts val="2400"/>
+              <a:buNone/>
+              <a:defRPr sz="2400"/>
+            </a:lvl1pPr>
+            <a:lvl2pPr lvl="1" algn="r" rtl="0">
+              <a:spcBef>
+                <a:spcPts val="0"/>
+              </a:spcBef>
+              <a:spcAft>
+                <a:spcPts val="0"/>
+              </a:spcAft>
+              <a:buSzPts val="2400"/>
+              <a:buNone/>
+              <a:defRPr sz="2400"/>
+            </a:lvl2pPr>
+            <a:lvl3pPr lvl="2" algn="r" rtl="0">
+              <a:spcBef>
+                <a:spcPts val="0"/>
+              </a:spcBef>
+              <a:spcAft>
+                <a:spcPts val="0"/>
+              </a:spcAft>
+              <a:buSzPts val="2400"/>
+              <a:buNone/>
+              <a:defRPr sz="2400"/>
+            </a:lvl3pPr>
+            <a:lvl4pPr lvl="3" algn="r" rtl="0">
+              <a:spcBef>
+                <a:spcPts val="0"/>
+              </a:spcBef>
+              <a:spcAft>
+                <a:spcPts val="0"/>
+              </a:spcAft>
+              <a:buSzPts val="2400"/>
+              <a:buNone/>
+              <a:defRPr sz="2400"/>
+            </a:lvl4pPr>
+            <a:lvl5pPr lvl="4" algn="r" rtl="0">
+              <a:spcBef>
+                <a:spcPts val="0"/>
+              </a:spcBef>
+              <a:spcAft>
+                <a:spcPts val="0"/>
+              </a:spcAft>
+              <a:buSzPts val="2400"/>
+              <a:buNone/>
+              <a:defRPr sz="2400"/>
+            </a:lvl5pPr>
+            <a:lvl6pPr lvl="5" algn="r" rtl="0">
+              <a:spcBef>
+                <a:spcPts val="0"/>
+              </a:spcBef>
+              <a:spcAft>
+                <a:spcPts val="0"/>
+              </a:spcAft>
+              <a:buSzPts val="2400"/>
+              <a:buNone/>
+              <a:defRPr sz="2400"/>
+            </a:lvl6pPr>
+            <a:lvl7pPr lvl="6" algn="r" rtl="0">
+              <a:spcBef>
+                <a:spcPts val="0"/>
+              </a:spcBef>
+              <a:spcAft>
+                <a:spcPts val="0"/>
+              </a:spcAft>
+              <a:buSzPts val="2400"/>
+              <a:buNone/>
+              <a:defRPr sz="2400"/>
+            </a:lvl7pPr>
+            <a:lvl8pPr lvl="7" algn="r" rtl="0">
+              <a:spcBef>
+                <a:spcPts val="0"/>
+              </a:spcBef>
+              <a:spcAft>
+                <a:spcPts val="0"/>
+              </a:spcAft>
+              <a:buSzPts val="2400"/>
+              <a:buNone/>
+              <a:defRPr sz="2400"/>
+            </a:lvl8pPr>
+            <a:lvl9pPr lvl="8" algn="r" rtl="0">
+              <a:spcBef>
+                <a:spcPts val="0"/>
+              </a:spcBef>
+              <a:spcAft>
+                <a:spcPts val="0"/>
+              </a:spcAft>
+              <a:buSzPts val="2400"/>
+              <a:buNone/>
+              <a:defRPr sz="2400"/>
             </a:lvl9pPr>
           </a:lstStyle>
           <a:p>
@@ -10574,10 +10316,9 @@
     <p:sldLayoutId id="2147483653" r:id="rId5"/>
     <p:sldLayoutId id="2147483657" r:id="rId6"/>
     <p:sldLayoutId id="2147483661" r:id="rId7"/>
-    <p:sldLayoutId id="2147483663" r:id="rId8"/>
-    <p:sldLayoutId id="2147483664" r:id="rId9"/>
-    <p:sldLayoutId id="2147483670" r:id="rId10"/>
-    <p:sldLayoutId id="2147483671" r:id="rId11"/>
+    <p:sldLayoutId id="2147483664" r:id="rId8"/>
+    <p:sldLayoutId id="2147483670" r:id="rId9"/>
+    <p:sldLayoutId id="2147483671" r:id="rId10"/>
   </p:sldLayoutIdLst>
   <p:hf hdr="0" ftr="0" dt="0"/>
   <p:txStyles>
@@ -14740,7 +14481,7 @@
               <a:buNone/>
             </a:pPr>
             <a:r>
-              <a:rPr lang="en" sz="1100" dirty="0">
+              <a:rPr lang="en" sz="1100" strike="sngStrike" dirty="0">
                 <a:solidFill>
                   <a:schemeClr val="accent1"/>
                 </a:solidFill>
@@ -14749,7 +14490,7 @@
               <a:t>4</a:t>
             </a:r>
             <a:r>
-              <a:rPr lang="en" sz="1200" dirty="0">
+              <a:rPr lang="en" sz="1200" strike="sngStrike" dirty="0">
                 <a:solidFill>
                   <a:schemeClr val="accent1"/>
                 </a:solidFill>
@@ -14757,7 +14498,7 @@
               </a:rPr>
               <a:t>.* - Natural Language Processing (NLP)</a:t>
             </a:r>
-            <a:endParaRPr sz="1200" dirty="0">
+            <a:endParaRPr sz="1200" strike="sngStrike" dirty="0">
               <a:solidFill>
                 <a:schemeClr val="accent1"/>
               </a:solidFill>
@@ -14881,7 +14622,7 @@
               <a:buNone/>
             </a:pPr>
             <a:r>
-              <a:rPr lang="en" sz="1100" dirty="0">
+              <a:rPr lang="en" sz="1100" strike="sngStrike" dirty="0">
                 <a:solidFill>
                   <a:schemeClr val="accent1"/>
                 </a:solidFill>
@@ -14889,7 +14630,7 @@
               </a:rPr>
               <a:t>2.5 - KNN</a:t>
             </a:r>
-            <a:endParaRPr sz="1100" dirty="0">
+            <a:endParaRPr sz="1100" strike="sngStrike" dirty="0">
               <a:solidFill>
                 <a:schemeClr val="accent1"/>
               </a:solidFill>
@@ -14933,7 +14674,7 @@
           <a:p>
             <a:pPr algn="ctr"/>
             <a:r>
-              <a:rPr lang="en" sz="1200" dirty="0">
+              <a:rPr lang="en" sz="1200" strike="sngStrike" dirty="0">
                 <a:solidFill>
                   <a:schemeClr val="accent1"/>
                 </a:solidFill>
@@ -14941,7 +14682,7 @@
               </a:rPr>
               <a:t>3.2 - Neural Networks</a:t>
             </a:r>
-            <a:endParaRPr sz="1200" dirty="0">
+            <a:endParaRPr sz="1200" strike="sngStrike" dirty="0">
               <a:solidFill>
                 <a:schemeClr val="accent1"/>
               </a:solidFill>
@@ -15403,10 +15144,10 @@
               <a:buNone/>
             </a:pPr>
             <a:r>
-              <a:rPr lang="en"/>
+              <a:rPr lang="en" dirty="0"/>
               <a:t>Operations</a:t>
             </a:r>
-            <a:endParaRPr/>
+            <a:endParaRPr dirty="0"/>
           </a:p>
           <a:p>
             <a:pPr marL="0" lvl="0" indent="0" algn="l" rtl="0">
@@ -15418,7 +15159,7 @@
               </a:spcAft>
               <a:buNone/>
             </a:pPr>
-            <a:endParaRPr/>
+            <a:endParaRPr dirty="0"/>
           </a:p>
         </p:txBody>
       </p:sp>
@@ -15435,7 +15176,7 @@
   <p:cSld>
     <p:spTree>
       <p:nvGrpSpPr>
-        <p:cNvPr id="1" name="Shape 277"/>
+        <p:cNvPr id="1" name=""/>
         <p:cNvGrpSpPr/>
         <p:nvPr/>
       </p:nvGrpSpPr>
@@ -15449,47 +15190,73 @@
       </p:grpSpPr>
       <p:sp>
         <p:nvSpPr>
-          <p:cNvPr id="278" name="Google Shape;278;p50"/>
-          <p:cNvSpPr txBox="1">
+          <p:cNvPr id="2" name="Text Placeholder 1">
+            <a:extLst>
+              <a:ext uri="{FF2B5EF4-FFF2-40B4-BE49-F238E27FC236}">
+                <a16:creationId xmlns:a16="http://schemas.microsoft.com/office/drawing/2014/main" id="{866B7C20-F402-1346-D74E-C9C0BB2D46B2}"/>
+              </a:ext>
+            </a:extLst>
+          </p:cNvPr>
+          <p:cNvSpPr>
+            <a:spLocks noGrp="1"/>
+          </p:cNvSpPr>
+          <p:nvPr>
+            <p:ph type="body" idx="1"/>
+          </p:nvPr>
+        </p:nvSpPr>
+        <p:spPr/>
+        <p:txBody>
+          <a:bodyPr/>
+          <a:lstStyle/>
+          <a:p>
+            <a:pPr marL="152400" indent="0">
+              <a:buNone/>
+            </a:pPr>
+            <a:r>
+              <a:rPr lang="en" sz="2400" b="1" dirty="0">
+                <a:latin typeface="Exo 2"/>
+                <a:sym typeface="Exo 2"/>
+              </a:rPr>
+              <a:t>Thank you!</a:t>
+            </a:r>
+            <a:endParaRPr lang="en-US" sz="2400" b="1" dirty="0">
+              <a:latin typeface="Exo 2"/>
+              <a:sym typeface="Exo 2"/>
+            </a:endParaRPr>
+          </a:p>
+        </p:txBody>
+      </p:sp>
+      <p:sp>
+        <p:nvSpPr>
+          <p:cNvPr id="3" name="Title 2">
+            <a:extLst>
+              <a:ext uri="{FF2B5EF4-FFF2-40B4-BE49-F238E27FC236}">
+                <a16:creationId xmlns:a16="http://schemas.microsoft.com/office/drawing/2014/main" id="{55FC1057-B27B-6C00-91F8-03F6A80FCC52}"/>
+              </a:ext>
+            </a:extLst>
+          </p:cNvPr>
+          <p:cNvSpPr>
             <a:spLocks noGrp="1"/>
           </p:cNvSpPr>
           <p:nvPr>
             <p:ph type="ctrTitle"/>
           </p:nvPr>
         </p:nvSpPr>
-        <p:spPr>
-          <a:xfrm flipH="1">
-            <a:off x="1193529" y="1611150"/>
-            <a:ext cx="5195700" cy="1921200"/>
-          </a:xfrm>
-          <a:prstGeom prst="rect">
-            <a:avLst/>
-          </a:prstGeom>
-        </p:spPr>
+        <p:spPr/>
         <p:txBody>
-          <a:bodyPr spcFirstLastPara="1" wrap="square" lIns="91425" tIns="91425" rIns="91425" bIns="91425" anchor="ctr" anchorCtr="0">
-            <a:noAutofit/>
-          </a:bodyPr>
+          <a:bodyPr/>
           <a:lstStyle/>
           <a:p>
-            <a:pPr marL="0" lvl="0" indent="0" algn="l" rtl="0">
-              <a:spcBef>
-                <a:spcPts val="0"/>
-              </a:spcBef>
-              <a:spcAft>
-                <a:spcPts val="0"/>
-              </a:spcAft>
-              <a:buNone/>
-            </a:pPr>
-            <a:r>
-              <a:rPr lang="en"/>
-              <a:t>Thank you!</a:t>
-            </a:r>
-            <a:endParaRPr/>
+            <a:endParaRPr lang="en-US" dirty="0"/>
           </a:p>
         </p:txBody>
       </p:sp>
     </p:spTree>
+    <p:extLst>
+      <p:ext uri="{BB962C8B-B14F-4D97-AF65-F5344CB8AC3E}">
+        <p14:creationId xmlns:p14="http://schemas.microsoft.com/office/powerpoint/2010/main" val="3469588198"/>
+      </p:ext>
+    </p:extLst>
   </p:cSld>
   <p:clrMapOvr>
     <a:masterClrMapping/>
